--- a/eval/out/showcase_qcommerce.pptx
+++ b/eval/out/showcase_qcommerce.pptx
@@ -3752,14 +3752,14 @@
         </p:nvSpPr>
         <p:spPr>
           <a:xfrm>
-            <a:off x="0" y="2286000"/>
-            <a:ext cx="12192000" cy="54864"/>
+            <a:off x="0" y="0"/>
+            <a:ext cx="12192000" cy="6858000"/>
           </a:xfrm>
           <a:prstGeom prst="rect">
             <a:avLst/>
           </a:prstGeom>
           <a:solidFill>
-            <a:srgbClr val="C05621"/>
+            <a:srgbClr val="2C3A47"/>
           </a:solidFill>
           <a:ln>
             <a:noFill/>
@@ -3796,8 +3796,8 @@
         </p:nvSpPr>
         <p:spPr>
           <a:xfrm>
-            <a:off x="914400" y="2606040"/>
-            <a:ext cx="10363200" cy="432904"/>
+            <a:off x="9265920" y="320040"/>
+            <a:ext cx="2560320" cy="274320"/>
           </a:xfrm>
           <a:prstGeom prst="rect">
             <a:avLst/>
@@ -3810,9 +3810,51 @@
           </a:bodyPr>
           <a:lstStyle/>
           <a:p>
+            <a:pPr algn="r">
+              <a:spcBef>
+                <a:spcPts val="0"/>
+              </a:spcBef>
+              <a:spcAft>
+                <a:spcPts val="0"/>
+              </a:spcAft>
+            </a:pPr>
+            <a:r>
+              <a:rPr sz="1000" b="0" i="0">
+                <a:solidFill>
+                  <a:srgbClr val="FFFFFF"/>
+                </a:solidFill>
+                <a:latin typeface="Segoe UI"/>
+              </a:rPr>
+              <a:t>19 July 2026</a:t>
+            </a:r>
+          </a:p>
+        </p:txBody>
+      </p:sp>
+      <p:sp>
+        <p:nvSpPr>
+          <p:cNvPr id="4" name="TextBox 3"/>
+          <p:cNvSpPr txBox="1"/>
+          <p:nvPr/>
+        </p:nvSpPr>
+        <p:spPr>
+          <a:xfrm>
+            <a:off x="1005840" y="1371600"/>
+            <a:ext cx="10180320" cy="1154410"/>
+          </a:xfrm>
+          <a:prstGeom prst="rect">
+            <a:avLst/>
+          </a:prstGeom>
+          <a:noFill/>
+        </p:spPr>
+        <p:txBody>
+          <a:bodyPr wrap="square" lIns="0" rIns="0" tIns="0" bIns="0" anchor="t">
+            <a:noAutofit/>
+          </a:bodyPr>
+          <a:lstStyle/>
+          <a:p>
             <a:pPr algn="l">
               <a:lnSpc>
-                <a:spcPts val="3408"/>
+                <a:spcPts val="4544"/>
               </a:lnSpc>
               <a:spcBef>
                 <a:spcPts val="0"/>
@@ -3822,81 +3864,94 @@
               </a:spcAft>
             </a:pPr>
             <a:r>
-              <a:rPr sz="3000" b="0" i="0">
-                <a:solidFill>
-                  <a:srgbClr val="51626F"/>
+              <a:rPr sz="4000" b="0" i="0">
+                <a:solidFill>
+                  <a:srgbClr val="FFFFFF"/>
                 </a:solidFill>
                 <a:latin typeface="Georgia"/>
               </a:rPr>
               <a:t>India </a:t>
             </a:r>
             <a:r>
-              <a:rPr sz="3000" b="0" i="0">
-                <a:solidFill>
-                  <a:srgbClr val="51626F"/>
+              <a:rPr sz="4000" b="0" i="0">
+                <a:solidFill>
+                  <a:srgbClr val="FFFFFF"/>
                 </a:solidFill>
                 <a:latin typeface="Georgia"/>
               </a:rPr>
               <a:t>Quick </a:t>
             </a:r>
             <a:r>
-              <a:rPr sz="3000" b="0" i="0">
-                <a:solidFill>
-                  <a:srgbClr val="51626F"/>
+              <a:rPr sz="4000" b="0" i="0">
+                <a:solidFill>
+                  <a:srgbClr val="FFFFFF"/>
                 </a:solidFill>
                 <a:latin typeface="Georgia"/>
               </a:rPr>
               <a:t>Commerce: </a:t>
             </a:r>
             <a:r>
-              <a:rPr sz="3000" b="0" i="0">
-                <a:solidFill>
-                  <a:srgbClr val="51626F"/>
+              <a:rPr sz="4000" b="0" i="0">
+                <a:solidFill>
+                  <a:srgbClr val="FFFFFF"/>
                 </a:solidFill>
                 <a:latin typeface="Georgia"/>
               </a:rPr>
               <a:t>Winning </a:t>
             </a:r>
             <a:r>
-              <a:rPr sz="3000" b="0" i="0">
-                <a:solidFill>
-                  <a:srgbClr val="51626F"/>
+              <a:rPr sz="4000" b="0" i="0">
+                <a:solidFill>
+                  <a:srgbClr val="FFFFFF"/>
                 </a:solidFill>
                 <a:latin typeface="Georgia"/>
               </a:rPr>
               <a:t>the </a:t>
             </a:r>
             <a:r>
-              <a:rPr sz="3000" b="0" i="0">
-                <a:solidFill>
-                  <a:srgbClr val="51626F"/>
+              <a:rPr sz="4000" b="0" i="0">
+                <a:solidFill>
+                  <a:srgbClr val="FFFFFF"/>
                 </a:solidFill>
                 <a:latin typeface="Georgia"/>
               </a:rPr>
-              <a:t>Next </a:t>
-            </a:r>
-            <a:r>
-              <a:rPr sz="3000" b="0" i="0">
-                <a:solidFill>
-                  <a:srgbClr val="51626F"/>
+              <a:t>Next</a:t>
+            </a:r>
+          </a:p>
+          <a:p>
+            <a:pPr algn="l">
+              <a:lnSpc>
+                <a:spcPts val="4544"/>
+              </a:lnSpc>
+              <a:spcBef>
+                <a:spcPts val="0"/>
+              </a:spcBef>
+              <a:spcAft>
+                <a:spcPts val="0"/>
+              </a:spcAft>
+            </a:pPr>
+            <a:r>
+              <a:rPr sz="4000" b="0" i="0">
+                <a:solidFill>
+                  <a:srgbClr val="FFFFFF"/>
                 </a:solidFill>
                 <a:latin typeface="Georgia"/>
               </a:rPr>
               <a:t>$12B </a:t>
             </a:r>
             <a:r>
-              <a:rPr sz="3000" b="0" i="0">
-                <a:solidFill>
-                  <a:srgbClr val="51626F"/>
+              <a:rPr sz="4000" b="0" i="0">
+                <a:solidFill>
+                  <a:srgbClr val="FFFFFF"/>
                 </a:solidFill>
                 <a:latin typeface="Georgia"/>
               </a:rPr>
               <a:t>of </a:t>
             </a:r>
             <a:r>
-              <a:rPr sz="3000" b="0" i="0">
-                <a:solidFill>
-                  <a:srgbClr val="51626F"/>
+              <a:rPr sz="4000" b="0" i="0">
+                <a:solidFill>
+                  <a:srgbClr val="FFFFFF"/>
                 </a:solidFill>
                 <a:latin typeface="Georgia"/>
               </a:rPr>
@@ -3907,14 +3962,14 @@
       </p:sp>
       <p:sp>
         <p:nvSpPr>
-          <p:cNvPr id="4" name="TextBox 3"/>
+          <p:cNvPr id="5" name="TextBox 4"/>
           <p:cNvSpPr txBox="1"/>
           <p:nvPr/>
         </p:nvSpPr>
         <p:spPr>
           <a:xfrm>
-            <a:off x="914400" y="3176104"/>
-            <a:ext cx="10363200" cy="244934"/>
+            <a:off x="1005840" y="2635738"/>
+            <a:ext cx="10180320" cy="244934"/>
           </a:xfrm>
           <a:prstGeom prst="rect">
             <a:avLst/>
@@ -3941,7 +3996,7 @@
             <a:r>
               <a:rPr sz="1450" b="0" i="0">
                 <a:solidFill>
-                  <a:srgbClr val="6E6A61"/>
+                  <a:srgbClr val="FFFFFF"/>
                 </a:solidFill>
                 <a:latin typeface="Segoe UI"/>
               </a:rPr>
@@ -3950,7 +4005,7 @@
             <a:r>
               <a:rPr sz="1450" b="0" i="0">
                 <a:solidFill>
-                  <a:srgbClr val="6E6A61"/>
+                  <a:srgbClr val="FFFFFF"/>
                 </a:solidFill>
                 <a:latin typeface="Segoe UI"/>
               </a:rPr>
@@ -3959,7 +4014,7 @@
             <a:r>
               <a:rPr sz="1450" b="0" i="0">
                 <a:solidFill>
-                  <a:srgbClr val="6E6A61"/>
+                  <a:srgbClr val="FFFFFF"/>
                 </a:solidFill>
                 <a:latin typeface="Segoe UI"/>
               </a:rPr>
@@ -3968,7 +4023,7 @@
             <a:r>
               <a:rPr sz="1450" b="0" i="0">
                 <a:solidFill>
-                  <a:srgbClr val="6E6A61"/>
+                  <a:srgbClr val="FFFFFF"/>
                 </a:solidFill>
                 <a:latin typeface="Segoe UI"/>
               </a:rPr>
@@ -3977,7 +4032,7 @@
             <a:r>
               <a:rPr sz="1450" b="0" i="0">
                 <a:solidFill>
-                  <a:srgbClr val="6E6A61"/>
+                  <a:srgbClr val="FFFFFF"/>
                 </a:solidFill>
                 <a:latin typeface="Segoe UI"/>
               </a:rPr>
@@ -3986,7 +4041,7 @@
             <a:r>
               <a:rPr sz="1450" b="0" i="0">
                 <a:solidFill>
-                  <a:srgbClr val="6E6A61"/>
+                  <a:srgbClr val="FFFFFF"/>
                 </a:solidFill>
                 <a:latin typeface="Segoe UI"/>
               </a:rPr>
@@ -3995,7 +4050,7 @@
             <a:r>
               <a:rPr sz="1450" b="0" i="0">
                 <a:solidFill>
-                  <a:srgbClr val="6E6A61"/>
+                  <a:srgbClr val="FFFFFF"/>
                 </a:solidFill>
                 <a:latin typeface="Segoe UI"/>
               </a:rPr>
@@ -4004,7 +4059,7 @@
             <a:r>
               <a:rPr sz="1450" b="0" i="0">
                 <a:solidFill>
-                  <a:srgbClr val="6E6A61"/>
+                  <a:srgbClr val="FFFFFF"/>
                 </a:solidFill>
                 <a:latin typeface="Segoe UI"/>
               </a:rPr>
@@ -4013,7 +4068,7 @@
             <a:r>
               <a:rPr sz="1450" b="0" i="0">
                 <a:solidFill>
-                  <a:srgbClr val="6E6A61"/>
+                  <a:srgbClr val="FFFFFF"/>
                 </a:solidFill>
                 <a:latin typeface="Segoe UI"/>
               </a:rPr>
@@ -4022,7 +4077,7 @@
             <a:r>
               <a:rPr sz="1450" b="0" i="0">
                 <a:solidFill>
-                  <a:srgbClr val="6E6A61"/>
+                  <a:srgbClr val="FFFFFF"/>
                 </a:solidFill>
                 <a:latin typeface="Segoe UI"/>
               </a:rPr>
@@ -4031,7 +4086,7 @@
             <a:r>
               <a:rPr sz="1450" b="0" i="0">
                 <a:solidFill>
-                  <a:srgbClr val="6E6A61"/>
+                  <a:srgbClr val="FFFFFF"/>
                 </a:solidFill>
                 <a:latin typeface="Segoe UI"/>
               </a:rPr>
@@ -4040,7 +4095,7 @@
             <a:r>
               <a:rPr sz="1450" b="0" i="0">
                 <a:solidFill>
-                  <a:srgbClr val="6E6A61"/>
+                  <a:srgbClr val="FFFFFF"/>
                 </a:solidFill>
                 <a:latin typeface="Segoe UI"/>
               </a:rPr>
@@ -4049,7 +4104,7 @@
             <a:r>
               <a:rPr sz="1450" b="0" i="0">
                 <a:solidFill>
-                  <a:srgbClr val="6E6A61"/>
+                  <a:srgbClr val="FFFFFF"/>
                 </a:solidFill>
                 <a:latin typeface="Segoe UI"/>
               </a:rPr>
@@ -4060,14 +4115,14 @@
       </p:sp>
       <p:sp>
         <p:nvSpPr>
-          <p:cNvPr id="5" name="TextBox 4"/>
+          <p:cNvPr id="6" name="TextBox 5"/>
           <p:cNvSpPr txBox="1"/>
           <p:nvPr/>
         </p:nvSpPr>
         <p:spPr>
           <a:xfrm>
-            <a:off x="914400" y="6035040"/>
-            <a:ext cx="10363200" cy="274320"/>
+            <a:off x="1005840" y="4572000"/>
+            <a:ext cx="10180320" cy="548640"/>
           </a:xfrm>
           <a:prstGeom prst="rect">
             <a:avLst/>
@@ -4091,11 +4146,11 @@
             <a:r>
               <a:rPr sz="1000" b="0" i="0">
                 <a:solidFill>
-                  <a:srgbClr val="6E6A61"/>
-                </a:solidFill>
-                <a:latin typeface="Segoe UI"/>
-              </a:rPr>
-              <a:t>19 July 2026 | SkyQuest Market Intelligence</a:t>
+                  <a:srgbClr val="FFFFFF"/>
+                </a:solidFill>
+                <a:latin typeface="Segoe UI"/>
+              </a:rPr>
+              <a:t>SkyQuest Market Intelligence</a:t>
             </a:r>
           </a:p>
         </p:txBody>
@@ -4135,13 +4190,13 @@
         <p:spPr>
           <a:xfrm>
             <a:off x="0" y="0"/>
-            <a:ext cx="164592" cy="6858000"/>
+            <a:ext cx="12192000" cy="6858000"/>
           </a:xfrm>
           <a:prstGeom prst="rect">
             <a:avLst/>
           </a:prstGeom>
           <a:solidFill>
-            <a:srgbClr val="51626F"/>
+            <a:srgbClr val="C05621"/>
           </a:solidFill>
           <a:ln>
             <a:noFill/>
@@ -4178,8 +4233,8 @@
         </p:nvSpPr>
         <p:spPr>
           <a:xfrm>
-            <a:off x="914400" y="1463040"/>
-            <a:ext cx="10180320" cy="731520"/>
+            <a:off x="1371600" y="1600200"/>
+            <a:ext cx="9448800" cy="777240"/>
           </a:xfrm>
           <a:prstGeom prst="rect">
             <a:avLst/>
@@ -4192,7 +4247,7 @@
           </a:bodyPr>
           <a:lstStyle/>
           <a:p>
-            <a:pPr algn="l">
+            <a:pPr algn="ctr">
               <a:spcBef>
                 <a:spcPts val="0"/>
               </a:spcBef>
@@ -4203,7 +4258,7 @@
             <a:r>
               <a:rPr sz="4000" b="1" i="0">
                 <a:solidFill>
-                  <a:srgbClr val="C05621"/>
+                  <a:srgbClr val="FFFFFF"/>
                 </a:solidFill>
                 <a:latin typeface="Georgia"/>
               </a:rPr>
@@ -4220,8 +4275,8 @@
         </p:nvSpPr>
         <p:spPr>
           <a:xfrm>
-            <a:off x="914400" y="2286000"/>
-            <a:ext cx="10180320" cy="375183"/>
+            <a:off x="1371600" y="2468880"/>
+            <a:ext cx="9448800" cy="432904"/>
           </a:xfrm>
           <a:prstGeom prst="rect">
             <a:avLst/>
@@ -4234,9 +4289,9 @@
           </a:bodyPr>
           <a:lstStyle/>
           <a:p>
-            <a:pPr algn="l">
+            <a:pPr algn="ctr">
               <a:lnSpc>
-                <a:spcPts val="2954"/>
+                <a:spcPts val="3408"/>
               </a:lnSpc>
               <a:spcBef>
                 <a:spcPts val="0"/>
@@ -4246,18 +4301,18 @@
               </a:spcAft>
             </a:pPr>
             <a:r>
-              <a:rPr sz="2600" b="0" i="0">
-                <a:solidFill>
-                  <a:srgbClr val="51626F"/>
+              <a:rPr sz="3000" b="0" i="0">
+                <a:solidFill>
+                  <a:srgbClr val="FFFFFF"/>
                 </a:solidFill>
                 <a:latin typeface="Georgia"/>
               </a:rPr>
               <a:t>The </a:t>
             </a:r>
             <a:r>
-              <a:rPr sz="2600" b="0" i="0">
-                <a:solidFill>
-                  <a:srgbClr val="51626F"/>
+              <a:rPr sz="3000" b="0" i="0">
+                <a:solidFill>
+                  <a:srgbClr val="FFFFFF"/>
                 </a:solidFill>
                 <a:latin typeface="Georgia"/>
               </a:rPr>
@@ -4274,8 +4329,8 @@
         </p:nvSpPr>
         <p:spPr>
           <a:xfrm>
-            <a:off x="914400" y="2752623"/>
-            <a:ext cx="10180320" cy="244934"/>
+            <a:off x="1371600" y="2993224"/>
+            <a:ext cx="9448800" cy="244934"/>
           </a:xfrm>
           <a:prstGeom prst="rect">
             <a:avLst/>
@@ -4288,7 +4343,7 @@
           </a:bodyPr>
           <a:lstStyle/>
           <a:p>
-            <a:pPr algn="l">
+            <a:pPr algn="ctr">
               <a:lnSpc>
                 <a:spcPts val="1928"/>
               </a:lnSpc>
@@ -4302,7 +4357,7 @@
             <a:r>
               <a:rPr sz="1450" b="0" i="0">
                 <a:solidFill>
-                  <a:srgbClr val="6E6A61"/>
+                  <a:srgbClr val="FFFFFF"/>
                 </a:solidFill>
                 <a:latin typeface="Segoe UI"/>
               </a:rPr>
@@ -4311,7 +4366,7 @@
             <a:r>
               <a:rPr sz="1450" b="0" i="0">
                 <a:solidFill>
-                  <a:srgbClr val="6E6A61"/>
+                  <a:srgbClr val="FFFFFF"/>
                 </a:solidFill>
                 <a:latin typeface="Segoe UI"/>
               </a:rPr>
@@ -4320,7 +4375,7 @@
             <a:r>
               <a:rPr sz="1450" b="0" i="0">
                 <a:solidFill>
-                  <a:srgbClr val="6E6A61"/>
+                  <a:srgbClr val="FFFFFF"/>
                 </a:solidFill>
                 <a:latin typeface="Segoe UI"/>
               </a:rPr>
@@ -4329,7 +4384,7 @@
             <a:r>
               <a:rPr sz="1450" b="0" i="0">
                 <a:solidFill>
-                  <a:srgbClr val="6E6A61"/>
+                  <a:srgbClr val="FFFFFF"/>
                 </a:solidFill>
                 <a:latin typeface="Segoe UI"/>
               </a:rPr>
@@ -4338,7 +4393,7 @@
             <a:r>
               <a:rPr sz="1450" b="0" i="0">
                 <a:solidFill>
-                  <a:srgbClr val="6E6A61"/>
+                  <a:srgbClr val="FFFFFF"/>
                 </a:solidFill>
                 <a:latin typeface="Segoe UI"/>
               </a:rPr>
@@ -4347,7 +4402,7 @@
             <a:r>
               <a:rPr sz="1450" b="0" i="0">
                 <a:solidFill>
-                  <a:srgbClr val="6E6A61"/>
+                  <a:srgbClr val="FFFFFF"/>
                 </a:solidFill>
                 <a:latin typeface="Segoe UI"/>
               </a:rPr>
@@ -4356,7 +4411,7 @@
             <a:r>
               <a:rPr sz="1450" b="0" i="0">
                 <a:solidFill>
-                  <a:srgbClr val="6E6A61"/>
+                  <a:srgbClr val="FFFFFF"/>
                 </a:solidFill>
                 <a:latin typeface="Segoe UI"/>
               </a:rPr>
@@ -4365,7 +4420,7 @@
             <a:r>
               <a:rPr sz="1450" b="0" i="0">
                 <a:solidFill>
-                  <a:srgbClr val="6E6A61"/>
+                  <a:srgbClr val="FFFFFF"/>
                 </a:solidFill>
                 <a:latin typeface="Segoe UI"/>
               </a:rPr>
@@ -4374,7 +4429,7 @@
             <a:r>
               <a:rPr sz="1450" b="0" i="0">
                 <a:solidFill>
-                  <a:srgbClr val="6E6A61"/>
+                  <a:srgbClr val="FFFFFF"/>
                 </a:solidFill>
                 <a:latin typeface="Segoe UI"/>
               </a:rPr>
@@ -4383,7 +4438,7 @@
             <a:r>
               <a:rPr sz="1450" b="0" i="0">
                 <a:solidFill>
-                  <a:srgbClr val="6E6A61"/>
+                  <a:srgbClr val="FFFFFF"/>
                 </a:solidFill>
                 <a:latin typeface="Segoe UI"/>
               </a:rPr>
@@ -4392,7 +4447,7 @@
             <a:r>
               <a:rPr sz="1450" b="0" i="0">
                 <a:solidFill>
-                  <a:srgbClr val="6E6A61"/>
+                  <a:srgbClr val="FFFFFF"/>
                 </a:solidFill>
                 <a:latin typeface="Segoe UI"/>
               </a:rPr>
@@ -4401,7 +4456,7 @@
             <a:r>
               <a:rPr sz="1450" b="0" i="0">
                 <a:solidFill>
-                  <a:srgbClr val="6E6A61"/>
+                  <a:srgbClr val="FFFFFF"/>
                 </a:solidFill>
                 <a:latin typeface="Segoe UI"/>
               </a:rPr>
@@ -21377,13 +21432,13 @@
         <p:spPr>
           <a:xfrm>
             <a:off x="0" y="0"/>
-            <a:ext cx="164592" cy="6858000"/>
+            <a:ext cx="12192000" cy="6858000"/>
           </a:xfrm>
           <a:prstGeom prst="rect">
             <a:avLst/>
           </a:prstGeom>
           <a:solidFill>
-            <a:srgbClr val="51626F"/>
+            <a:srgbClr val="C05621"/>
           </a:solidFill>
           <a:ln>
             <a:noFill/>
@@ -21420,8 +21475,8 @@
         </p:nvSpPr>
         <p:spPr>
           <a:xfrm>
-            <a:off x="914400" y="1463040"/>
-            <a:ext cx="10180320" cy="731520"/>
+            <a:off x="1371600" y="1600200"/>
+            <a:ext cx="9448800" cy="777240"/>
           </a:xfrm>
           <a:prstGeom prst="rect">
             <a:avLst/>
@@ -21434,7 +21489,7 @@
           </a:bodyPr>
           <a:lstStyle/>
           <a:p>
-            <a:pPr algn="l">
+            <a:pPr algn="ctr">
               <a:spcBef>
                 <a:spcPts val="0"/>
               </a:spcBef>
@@ -21445,7 +21500,7 @@
             <a:r>
               <a:rPr sz="4000" b="1" i="0">
                 <a:solidFill>
-                  <a:srgbClr val="C05621"/>
+                  <a:srgbClr val="FFFFFF"/>
                 </a:solidFill>
                 <a:latin typeface="Georgia"/>
               </a:rPr>
@@ -21462,8 +21517,8 @@
         </p:nvSpPr>
         <p:spPr>
           <a:xfrm>
-            <a:off x="914400" y="2286000"/>
-            <a:ext cx="10180320" cy="375183"/>
+            <a:off x="1371600" y="2468880"/>
+            <a:ext cx="9448800" cy="432904"/>
           </a:xfrm>
           <a:prstGeom prst="rect">
             <a:avLst/>
@@ -21476,9 +21531,9 @@
           </a:bodyPr>
           <a:lstStyle/>
           <a:p>
-            <a:pPr algn="l">
+            <a:pPr algn="ctr">
               <a:lnSpc>
-                <a:spcPts val="2954"/>
+                <a:spcPts val="3408"/>
               </a:lnSpc>
               <a:spcBef>
                 <a:spcPts val="0"/>
@@ -21488,18 +21543,18 @@
               </a:spcAft>
             </a:pPr>
             <a:r>
-              <a:rPr sz="2600" b="0" i="0">
-                <a:solidFill>
-                  <a:srgbClr val="51626F"/>
+              <a:rPr sz="3000" b="0" i="0">
+                <a:solidFill>
+                  <a:srgbClr val="FFFFFF"/>
                 </a:solidFill>
                 <a:latin typeface="Georgia"/>
               </a:rPr>
               <a:t>The </a:t>
             </a:r>
             <a:r>
-              <a:rPr sz="2600" b="0" i="0">
-                <a:solidFill>
-                  <a:srgbClr val="51626F"/>
+              <a:rPr sz="3000" b="0" i="0">
+                <a:solidFill>
+                  <a:srgbClr val="FFFFFF"/>
                 </a:solidFill>
                 <a:latin typeface="Georgia"/>
               </a:rPr>
@@ -21516,8 +21571,8 @@
         </p:nvSpPr>
         <p:spPr>
           <a:xfrm>
-            <a:off x="914400" y="2752623"/>
-            <a:ext cx="10180320" cy="244934"/>
+            <a:off x="1371600" y="2993224"/>
+            <a:ext cx="9448800" cy="244934"/>
           </a:xfrm>
           <a:prstGeom prst="rect">
             <a:avLst/>
@@ -21530,7 +21585,7 @@
           </a:bodyPr>
           <a:lstStyle/>
           <a:p>
-            <a:pPr algn="l">
+            <a:pPr algn="ctr">
               <a:lnSpc>
                 <a:spcPts val="1928"/>
               </a:lnSpc>
@@ -21544,7 +21599,7 @@
             <a:r>
               <a:rPr sz="1450" b="0" i="0">
                 <a:solidFill>
-                  <a:srgbClr val="6E6A61"/>
+                  <a:srgbClr val="FFFFFF"/>
                 </a:solidFill>
                 <a:latin typeface="Segoe UI"/>
               </a:rPr>
@@ -21553,7 +21608,7 @@
             <a:r>
               <a:rPr sz="1450" b="0" i="0">
                 <a:solidFill>
-                  <a:srgbClr val="6E6A61"/>
+                  <a:srgbClr val="FFFFFF"/>
                 </a:solidFill>
                 <a:latin typeface="Segoe UI"/>
               </a:rPr>
@@ -21562,7 +21617,7 @@
             <a:r>
               <a:rPr sz="1450" b="0" i="0">
                 <a:solidFill>
-                  <a:srgbClr val="6E6A61"/>
+                  <a:srgbClr val="FFFFFF"/>
                 </a:solidFill>
                 <a:latin typeface="Segoe UI"/>
               </a:rPr>
@@ -21571,7 +21626,7 @@
             <a:r>
               <a:rPr sz="1450" b="0" i="0">
                 <a:solidFill>
-                  <a:srgbClr val="6E6A61"/>
+                  <a:srgbClr val="FFFFFF"/>
                 </a:solidFill>
                 <a:latin typeface="Segoe UI"/>
               </a:rPr>
@@ -21580,7 +21635,7 @@
             <a:r>
               <a:rPr sz="1450" b="0" i="0">
                 <a:solidFill>
-                  <a:srgbClr val="6E6A61"/>
+                  <a:srgbClr val="FFFFFF"/>
                 </a:solidFill>
                 <a:latin typeface="Segoe UI"/>
               </a:rPr>
@@ -21589,7 +21644,7 @@
             <a:r>
               <a:rPr sz="1450" b="0" i="0">
                 <a:solidFill>
-                  <a:srgbClr val="6E6A61"/>
+                  <a:srgbClr val="FFFFFF"/>
                 </a:solidFill>
                 <a:latin typeface="Segoe UI"/>
               </a:rPr>
@@ -21598,7 +21653,7 @@
             <a:r>
               <a:rPr sz="1450" b="0" i="0">
                 <a:solidFill>
-                  <a:srgbClr val="6E6A61"/>
+                  <a:srgbClr val="FFFFFF"/>
                 </a:solidFill>
                 <a:latin typeface="Segoe UI"/>
               </a:rPr>
@@ -21607,7 +21662,7 @@
             <a:r>
               <a:rPr sz="1450" b="0" i="0">
                 <a:solidFill>
-                  <a:srgbClr val="6E6A61"/>
+                  <a:srgbClr val="FFFFFF"/>
                 </a:solidFill>
                 <a:latin typeface="Segoe UI"/>
               </a:rPr>
@@ -30172,13 +30227,13 @@
         <p:spPr>
           <a:xfrm>
             <a:off x="0" y="0"/>
-            <a:ext cx="164592" cy="6858000"/>
+            <a:ext cx="12192000" cy="6858000"/>
           </a:xfrm>
           <a:prstGeom prst="rect">
             <a:avLst/>
           </a:prstGeom>
           <a:solidFill>
-            <a:srgbClr val="51626F"/>
+            <a:srgbClr val="C05621"/>
           </a:solidFill>
           <a:ln>
             <a:noFill/>
@@ -30215,8 +30270,8 @@
         </p:nvSpPr>
         <p:spPr>
           <a:xfrm>
-            <a:off x="914400" y="1463040"/>
-            <a:ext cx="10180320" cy="731520"/>
+            <a:off x="1371600" y="1600200"/>
+            <a:ext cx="9448800" cy="777240"/>
           </a:xfrm>
           <a:prstGeom prst="rect">
             <a:avLst/>
@@ -30229,7 +30284,7 @@
           </a:bodyPr>
           <a:lstStyle/>
           <a:p>
-            <a:pPr algn="l">
+            <a:pPr algn="ctr">
               <a:spcBef>
                 <a:spcPts val="0"/>
               </a:spcBef>
@@ -30240,7 +30295,7 @@
             <a:r>
               <a:rPr sz="4000" b="1" i="0">
                 <a:solidFill>
-                  <a:srgbClr val="C05621"/>
+                  <a:srgbClr val="FFFFFF"/>
                 </a:solidFill>
                 <a:latin typeface="Georgia"/>
               </a:rPr>
@@ -30257,8 +30312,8 @@
         </p:nvSpPr>
         <p:spPr>
           <a:xfrm>
-            <a:off x="914400" y="2286000"/>
-            <a:ext cx="10180320" cy="375183"/>
+            <a:off x="1371600" y="2468880"/>
+            <a:ext cx="9448800" cy="432904"/>
           </a:xfrm>
           <a:prstGeom prst="rect">
             <a:avLst/>
@@ -30271,9 +30326,9 @@
           </a:bodyPr>
           <a:lstStyle/>
           <a:p>
-            <a:pPr algn="l">
+            <a:pPr algn="ctr">
               <a:lnSpc>
-                <a:spcPts val="2954"/>
+                <a:spcPts val="3408"/>
               </a:lnSpc>
               <a:spcBef>
                 <a:spcPts val="0"/>
@@ -30283,18 +30338,18 @@
               </a:spcAft>
             </a:pPr>
             <a:r>
-              <a:rPr sz="2600" b="0" i="0">
-                <a:solidFill>
-                  <a:srgbClr val="51626F"/>
+              <a:rPr sz="3000" b="0" i="0">
+                <a:solidFill>
+                  <a:srgbClr val="FFFFFF"/>
                 </a:solidFill>
                 <a:latin typeface="Georgia"/>
               </a:rPr>
               <a:t>The </a:t>
             </a:r>
             <a:r>
-              <a:rPr sz="2600" b="0" i="0">
-                <a:solidFill>
-                  <a:srgbClr val="51626F"/>
+              <a:rPr sz="3000" b="0" i="0">
+                <a:solidFill>
+                  <a:srgbClr val="FFFFFF"/>
                 </a:solidFill>
                 <a:latin typeface="Georgia"/>
               </a:rPr>
@@ -30311,8 +30366,8 @@
         </p:nvSpPr>
         <p:spPr>
           <a:xfrm>
-            <a:off x="914400" y="2752623"/>
-            <a:ext cx="10180320" cy="244934"/>
+            <a:off x="1371600" y="2993224"/>
+            <a:ext cx="9448800" cy="244934"/>
           </a:xfrm>
           <a:prstGeom prst="rect">
             <a:avLst/>
@@ -30325,7 +30380,7 @@
           </a:bodyPr>
           <a:lstStyle/>
           <a:p>
-            <a:pPr algn="l">
+            <a:pPr algn="ctr">
               <a:lnSpc>
                 <a:spcPts val="1928"/>
               </a:lnSpc>
@@ -30339,7 +30394,7 @@
             <a:r>
               <a:rPr sz="1450" b="0" i="0">
                 <a:solidFill>
-                  <a:srgbClr val="6E6A61"/>
+                  <a:srgbClr val="FFFFFF"/>
                 </a:solidFill>
                 <a:latin typeface="Segoe UI"/>
               </a:rPr>
@@ -30348,7 +30403,7 @@
             <a:r>
               <a:rPr sz="1450" b="0" i="0">
                 <a:solidFill>
-                  <a:srgbClr val="6E6A61"/>
+                  <a:srgbClr val="FFFFFF"/>
                 </a:solidFill>
                 <a:latin typeface="Segoe UI"/>
               </a:rPr>
@@ -30357,7 +30412,7 @@
             <a:r>
               <a:rPr sz="1450" b="0" i="0">
                 <a:solidFill>
-                  <a:srgbClr val="6E6A61"/>
+                  <a:srgbClr val="FFFFFF"/>
                 </a:solidFill>
                 <a:latin typeface="Segoe UI"/>
               </a:rPr>
@@ -30366,7 +30421,7 @@
             <a:r>
               <a:rPr sz="1450" b="0" i="0">
                 <a:solidFill>
-                  <a:srgbClr val="6E6A61"/>
+                  <a:srgbClr val="FFFFFF"/>
                 </a:solidFill>
                 <a:latin typeface="Segoe UI"/>
               </a:rPr>
@@ -30375,7 +30430,7 @@
             <a:r>
               <a:rPr sz="1450" b="0" i="0">
                 <a:solidFill>
-                  <a:srgbClr val="6E6A61"/>
+                  <a:srgbClr val="FFFFFF"/>
                 </a:solidFill>
                 <a:latin typeface="Segoe UI"/>
               </a:rPr>
@@ -30384,7 +30439,7 @@
             <a:r>
               <a:rPr sz="1450" b="0" i="0">
                 <a:solidFill>
-                  <a:srgbClr val="6E6A61"/>
+                  <a:srgbClr val="FFFFFF"/>
                 </a:solidFill>
                 <a:latin typeface="Segoe UI"/>
               </a:rPr>
@@ -30393,7 +30448,7 @@
             <a:r>
               <a:rPr sz="1450" b="0" i="0">
                 <a:solidFill>
-                  <a:srgbClr val="6E6A61"/>
+                  <a:srgbClr val="FFFFFF"/>
                 </a:solidFill>
                 <a:latin typeface="Segoe UI"/>
               </a:rPr>
@@ -30402,7 +30457,7 @@
             <a:r>
               <a:rPr sz="1450" b="0" i="0">
                 <a:solidFill>
-                  <a:srgbClr val="6E6A61"/>
+                  <a:srgbClr val="FFFFFF"/>
                 </a:solidFill>
                 <a:latin typeface="Segoe UI"/>
               </a:rPr>
@@ -30411,7 +30466,7 @@
             <a:r>
               <a:rPr sz="1450" b="0" i="0">
                 <a:solidFill>
-                  <a:srgbClr val="6E6A61"/>
+                  <a:srgbClr val="FFFFFF"/>
                 </a:solidFill>
                 <a:latin typeface="Segoe UI"/>
               </a:rPr>
@@ -30420,7 +30475,7 @@
             <a:r>
               <a:rPr sz="1450" b="0" i="0">
                 <a:solidFill>
-                  <a:srgbClr val="6E6A61"/>
+                  <a:srgbClr val="FFFFFF"/>
                 </a:solidFill>
                 <a:latin typeface="Segoe UI"/>
               </a:rPr>
@@ -30429,7 +30484,7 @@
             <a:r>
               <a:rPr sz="1450" b="0" i="0">
                 <a:solidFill>
-                  <a:srgbClr val="6E6A61"/>
+                  <a:srgbClr val="FFFFFF"/>
                 </a:solidFill>
                 <a:latin typeface="Segoe UI"/>
               </a:rPr>

--- a/eval/out/showcase_qcommerce.pptx
+++ b/eval/out/showcase_qcommerce.pptx
@@ -16690,17 +16690,63 @@
       </p:sp>
       <p:sp>
         <p:nvSpPr>
-          <p:cNvPr id="3" name="Oval 2"/>
+          <p:cNvPr id="3" name="Rectangle 2"/>
           <p:cNvSpPr/>
           <p:nvPr/>
         </p:nvSpPr>
         <p:spPr>
           <a:xfrm>
-            <a:off x="411480" y="1160616"/>
-            <a:ext cx="384048" cy="384048"/>
-          </a:xfrm>
-          <a:prstGeom prst="ellipse">
-            <a:avLst/>
+            <a:off x="411480" y="1051560"/>
+            <a:ext cx="11369040" cy="548640"/>
+          </a:xfrm>
+          <a:prstGeom prst="rect">
+            <a:avLst/>
+          </a:prstGeom>
+          <a:solidFill>
+            <a:srgbClr val="FFFFFF"/>
+          </a:solidFill>
+          <a:ln>
+            <a:noFill/>
+          </a:ln>
+          <a:effectLst/>
+        </p:spPr>
+        <p:style>
+          <a:lnRef idx="1">
+            <a:schemeClr val="accent1"/>
+          </a:lnRef>
+          <a:fillRef idx="3">
+            <a:schemeClr val="accent1"/>
+          </a:fillRef>
+          <a:effectRef idx="2">
+            <a:schemeClr val="accent1"/>
+          </a:effectRef>
+          <a:fontRef idx="minor">
+            <a:schemeClr val="lt1"/>
+          </a:fontRef>
+        </p:style>
+        <p:txBody>
+          <a:bodyPr rtlCol="0" anchor="ctr"/>
+          <a:lstStyle/>
+          <a:p>
+            <a:pPr algn="ctr"/>
+          </a:p>
+        </p:txBody>
+      </p:sp>
+      <p:sp>
+        <p:nvSpPr>
+          <p:cNvPr id="4" name="Rounded Rectangle 3"/>
+          <p:cNvSpPr/>
+          <p:nvPr/>
+        </p:nvSpPr>
+        <p:spPr>
+          <a:xfrm>
+            <a:off x="457200" y="1074420"/>
+            <a:ext cx="502920" cy="502920"/>
+          </a:xfrm>
+          <a:prstGeom prst="roundRect">
+            <a:avLst>
+              <a:gd name="adj" fmla="val 18000"/>
+            </a:avLst>
           </a:prstGeom>
           <a:solidFill>
             <a:srgbClr val="2C3A47"/>
@@ -16734,7 +16780,7 @@
       </p:sp>
       <p:pic>
         <p:nvPicPr>
-          <p:cNvPr id="4" name="Picture 3" descr="money_ffffff_128.png"/>
+          <p:cNvPr id="5" name="Picture 4" descr="money_ffffff_128.png"/>
           <p:cNvPicPr>
             <a:picLocks noChangeAspect="1"/>
           </p:cNvPicPr>
@@ -16748,8 +16794,8 @@
         </p:blipFill>
         <p:spPr>
           <a:xfrm>
-            <a:off x="503652" y="1252788"/>
-            <a:ext cx="199704" cy="199704"/>
+            <a:off x="577901" y="1195121"/>
+            <a:ext cx="261518" cy="261518"/>
           </a:xfrm>
           <a:prstGeom prst="rect">
             <a:avLst/>
@@ -16758,14 +16804,14 @@
       </p:pic>
       <p:sp>
         <p:nvSpPr>
-          <p:cNvPr id="5" name="TextBox 4"/>
+          <p:cNvPr id="6" name="TextBox 5"/>
           <p:cNvSpPr txBox="1"/>
           <p:nvPr/>
         </p:nvSpPr>
         <p:spPr>
           <a:xfrm>
-            <a:off x="850392" y="1160616"/>
-            <a:ext cx="2404628" cy="384048"/>
+            <a:off x="1014984" y="1051560"/>
+            <a:ext cx="666333" cy="548640"/>
           </a:xfrm>
           <a:prstGeom prst="rect">
             <a:avLst/>
@@ -16779,9 +16825,6 @@
           <a:lstStyle/>
           <a:p>
             <a:pPr algn="l">
-              <a:lnSpc>
-                <a:spcPts val="1995"/>
-              </a:lnSpc>
               <a:spcBef>
                 <a:spcPts val="0"/>
               </a:spcBef>
@@ -16803,14 +16846,14 @@
       </p:sp>
       <p:sp>
         <p:nvSpPr>
-          <p:cNvPr id="6" name="TextBox 5"/>
+          <p:cNvPr id="7" name="TextBox 6"/>
           <p:cNvSpPr txBox="1"/>
           <p:nvPr/>
         </p:nvSpPr>
         <p:spPr>
           <a:xfrm>
-            <a:off x="3309884" y="1160616"/>
-            <a:ext cx="8470636" cy="384048"/>
+            <a:off x="1681317" y="1241420"/>
+            <a:ext cx="10053483" cy="168920"/>
           </a:xfrm>
           <a:prstGeom prst="rect">
             <a:avLst/>
@@ -16818,7 +16861,7 @@
           <a:noFill/>
         </p:spPr>
         <p:txBody>
-          <a:bodyPr wrap="square" lIns="0" rIns="0" tIns="0" bIns="0" anchor="ctr">
+          <a:bodyPr wrap="square" lIns="0" rIns="0" tIns="0" bIns="0" anchor="t">
             <a:noAutofit/>
           </a:bodyPr>
           <a:lstStyle/>
@@ -16974,17 +17017,63 @@
       </p:sp>
       <p:sp>
         <p:nvSpPr>
-          <p:cNvPr id="7" name="Oval 6"/>
+          <p:cNvPr id="8" name="Rectangle 7"/>
           <p:cNvSpPr/>
           <p:nvPr/>
         </p:nvSpPr>
         <p:spPr>
           <a:xfrm>
-            <a:off x="411480" y="1654392"/>
-            <a:ext cx="384048" cy="384048"/>
-          </a:xfrm>
-          <a:prstGeom prst="ellipse">
-            <a:avLst/>
+            <a:off x="411480" y="1627632"/>
+            <a:ext cx="11369040" cy="548640"/>
+          </a:xfrm>
+          <a:prstGeom prst="rect">
+            <a:avLst/>
+          </a:prstGeom>
+          <a:solidFill>
+            <a:srgbClr val="E6E3DA"/>
+          </a:solidFill>
+          <a:ln>
+            <a:noFill/>
+          </a:ln>
+          <a:effectLst/>
+        </p:spPr>
+        <p:style>
+          <a:lnRef idx="1">
+            <a:schemeClr val="accent1"/>
+          </a:lnRef>
+          <a:fillRef idx="3">
+            <a:schemeClr val="accent1"/>
+          </a:fillRef>
+          <a:effectRef idx="2">
+            <a:schemeClr val="accent1"/>
+          </a:effectRef>
+          <a:fontRef idx="minor">
+            <a:schemeClr val="lt1"/>
+          </a:fontRef>
+        </p:style>
+        <p:txBody>
+          <a:bodyPr rtlCol="0" anchor="ctr"/>
+          <a:lstStyle/>
+          <a:p>
+            <a:pPr algn="ctr"/>
+          </a:p>
+        </p:txBody>
+      </p:sp>
+      <p:sp>
+        <p:nvSpPr>
+          <p:cNvPr id="9" name="Rounded Rectangle 8"/>
+          <p:cNvSpPr/>
+          <p:nvPr/>
+        </p:nvSpPr>
+        <p:spPr>
+          <a:xfrm>
+            <a:off x="457200" y="1650492"/>
+            <a:ext cx="502920" cy="502920"/>
+          </a:xfrm>
+          <a:prstGeom prst="roundRect">
+            <a:avLst>
+              <a:gd name="adj" fmla="val 18000"/>
+            </a:avLst>
           </a:prstGeom>
           <a:solidFill>
             <a:srgbClr val="2C3A47"/>
@@ -17018,7 +17107,7 @@
       </p:sp>
       <p:pic>
         <p:nvPicPr>
-          <p:cNvPr id="8" name="Picture 7" descr="target_ffffff_128.png"/>
+          <p:cNvPr id="10" name="Picture 9" descr="target_ffffff_128.png"/>
           <p:cNvPicPr>
             <a:picLocks noChangeAspect="1"/>
           </p:cNvPicPr>
@@ -17032,8 +17121,8 @@
         </p:blipFill>
         <p:spPr>
           <a:xfrm>
-            <a:off x="503652" y="1746564"/>
-            <a:ext cx="199704" cy="199704"/>
+            <a:off x="577901" y="1771193"/>
+            <a:ext cx="261518" cy="261518"/>
           </a:xfrm>
           <a:prstGeom prst="rect">
             <a:avLst/>
@@ -17042,14 +17131,14 @@
       </p:pic>
       <p:sp>
         <p:nvSpPr>
-          <p:cNvPr id="9" name="TextBox 8"/>
+          <p:cNvPr id="11" name="TextBox 10"/>
           <p:cNvSpPr txBox="1"/>
           <p:nvPr/>
         </p:nvSpPr>
         <p:spPr>
           <a:xfrm>
-            <a:off x="850392" y="1654392"/>
-            <a:ext cx="2404628" cy="384048"/>
+            <a:off x="1014984" y="1627632"/>
+            <a:ext cx="430069" cy="548640"/>
           </a:xfrm>
           <a:prstGeom prst="rect">
             <a:avLst/>
@@ -17063,9 +17152,6 @@
           <a:lstStyle/>
           <a:p>
             <a:pPr algn="l">
-              <a:lnSpc>
-                <a:spcPts val="1995"/>
-              </a:lnSpc>
               <a:spcBef>
                 <a:spcPts val="0"/>
               </a:spcBef>
@@ -17087,14 +17173,14 @@
       </p:sp>
       <p:sp>
         <p:nvSpPr>
-          <p:cNvPr id="10" name="TextBox 9"/>
+          <p:cNvPr id="12" name="TextBox 11"/>
           <p:cNvSpPr txBox="1"/>
           <p:nvPr/>
         </p:nvSpPr>
         <p:spPr>
           <a:xfrm>
-            <a:off x="3309884" y="1654392"/>
-            <a:ext cx="8470636" cy="384048"/>
+            <a:off x="1445053" y="1817492"/>
+            <a:ext cx="10289747" cy="168920"/>
           </a:xfrm>
           <a:prstGeom prst="rect">
             <a:avLst/>
@@ -17102,7 +17188,7 @@
           <a:noFill/>
         </p:spPr>
         <p:txBody>
-          <a:bodyPr wrap="square" lIns="0" rIns="0" tIns="0" bIns="0" anchor="ctr">
+          <a:bodyPr wrap="square" lIns="0" rIns="0" tIns="0" bIns="0" anchor="t">
             <a:noAutofit/>
           </a:bodyPr>
           <a:lstStyle/>
@@ -17249,17 +17335,63 @@
       </p:sp>
       <p:sp>
         <p:nvSpPr>
-          <p:cNvPr id="11" name="Oval 10"/>
+          <p:cNvPr id="13" name="Rectangle 12"/>
           <p:cNvSpPr/>
           <p:nvPr/>
         </p:nvSpPr>
         <p:spPr>
           <a:xfrm>
-            <a:off x="411480" y="2148168"/>
-            <a:ext cx="384048" cy="384048"/>
-          </a:xfrm>
-          <a:prstGeom prst="ellipse">
-            <a:avLst/>
+            <a:off x="411480" y="2203704"/>
+            <a:ext cx="11369040" cy="548640"/>
+          </a:xfrm>
+          <a:prstGeom prst="rect">
+            <a:avLst/>
+          </a:prstGeom>
+          <a:solidFill>
+            <a:srgbClr val="FFFFFF"/>
+          </a:solidFill>
+          <a:ln>
+            <a:noFill/>
+          </a:ln>
+          <a:effectLst/>
+        </p:spPr>
+        <p:style>
+          <a:lnRef idx="1">
+            <a:schemeClr val="accent1"/>
+          </a:lnRef>
+          <a:fillRef idx="3">
+            <a:schemeClr val="accent1"/>
+          </a:fillRef>
+          <a:effectRef idx="2">
+            <a:schemeClr val="accent1"/>
+          </a:effectRef>
+          <a:fontRef idx="minor">
+            <a:schemeClr val="lt1"/>
+          </a:fontRef>
+        </p:style>
+        <p:txBody>
+          <a:bodyPr rtlCol="0" anchor="ctr"/>
+          <a:lstStyle/>
+          <a:p>
+            <a:pPr algn="ctr"/>
+          </a:p>
+        </p:txBody>
+      </p:sp>
+      <p:sp>
+        <p:nvSpPr>
+          <p:cNvPr id="14" name="Rounded Rectangle 13"/>
+          <p:cNvSpPr/>
+          <p:nvPr/>
+        </p:nvSpPr>
+        <p:spPr>
+          <a:xfrm>
+            <a:off x="457200" y="2226564"/>
+            <a:ext cx="502920" cy="502920"/>
+          </a:xfrm>
+          <a:prstGeom prst="roundRect">
+            <a:avLst>
+              <a:gd name="adj" fmla="val 18000"/>
+            </a:avLst>
           </a:prstGeom>
           <a:solidFill>
             <a:srgbClr val="2C3A47"/>
@@ -17293,7 +17425,7 @@
       </p:sp>
       <p:pic>
         <p:nvPicPr>
-          <p:cNvPr id="12" name="Picture 11" descr="growth_ffffff_128.png"/>
+          <p:cNvPr id="15" name="Picture 14" descr="growth_ffffff_128.png"/>
           <p:cNvPicPr>
             <a:picLocks noChangeAspect="1"/>
           </p:cNvPicPr>
@@ -17307,8 +17439,8 @@
         </p:blipFill>
         <p:spPr>
           <a:xfrm>
-            <a:off x="503652" y="2240340"/>
-            <a:ext cx="199704" cy="199704"/>
+            <a:off x="577901" y="2347265"/>
+            <a:ext cx="261518" cy="261518"/>
           </a:xfrm>
           <a:prstGeom prst="rect">
             <a:avLst/>
@@ -17317,14 +17449,14 @@
       </p:pic>
       <p:sp>
         <p:nvSpPr>
-          <p:cNvPr id="13" name="TextBox 12"/>
+          <p:cNvPr id="16" name="TextBox 15"/>
           <p:cNvSpPr txBox="1"/>
           <p:nvPr/>
         </p:nvSpPr>
         <p:spPr>
           <a:xfrm>
-            <a:off x="850392" y="2148168"/>
-            <a:ext cx="2404628" cy="384048"/>
+            <a:off x="1014984" y="2203704"/>
+            <a:ext cx="548201" cy="548640"/>
           </a:xfrm>
           <a:prstGeom prst="rect">
             <a:avLst/>
@@ -17338,9 +17470,6 @@
           <a:lstStyle/>
           <a:p>
             <a:pPr algn="l">
-              <a:lnSpc>
-                <a:spcPts val="1995"/>
-              </a:lnSpc>
               <a:spcBef>
                 <a:spcPts val="0"/>
               </a:spcBef>
@@ -17362,14 +17491,14 @@
       </p:sp>
       <p:sp>
         <p:nvSpPr>
-          <p:cNvPr id="14" name="TextBox 13"/>
+          <p:cNvPr id="17" name="TextBox 16"/>
           <p:cNvSpPr txBox="1"/>
           <p:nvPr/>
         </p:nvSpPr>
         <p:spPr>
           <a:xfrm>
-            <a:off x="3309884" y="2148168"/>
-            <a:ext cx="8470636" cy="384048"/>
+            <a:off x="1563185" y="2393564"/>
+            <a:ext cx="10171615" cy="168920"/>
           </a:xfrm>
           <a:prstGeom prst="rect">
             <a:avLst/>
@@ -17377,7 +17506,7 @@
           <a:noFill/>
         </p:spPr>
         <p:txBody>
-          <a:bodyPr wrap="square" lIns="0" rIns="0" tIns="0" bIns="0" anchor="ctr">
+          <a:bodyPr wrap="square" lIns="0" rIns="0" tIns="0" bIns="0" anchor="t">
             <a:noAutofit/>
           </a:bodyPr>
           <a:lstStyle/>
@@ -17479,17 +17608,63 @@
       </p:sp>
       <p:sp>
         <p:nvSpPr>
-          <p:cNvPr id="15" name="Oval 14"/>
+          <p:cNvPr id="18" name="Rectangle 17"/>
           <p:cNvSpPr/>
           <p:nvPr/>
         </p:nvSpPr>
         <p:spPr>
           <a:xfrm>
-            <a:off x="411480" y="2641944"/>
-            <a:ext cx="384048" cy="384048"/>
-          </a:xfrm>
-          <a:prstGeom prst="ellipse">
-            <a:avLst/>
+            <a:off x="411480" y="2779776"/>
+            <a:ext cx="11369040" cy="548640"/>
+          </a:xfrm>
+          <a:prstGeom prst="rect">
+            <a:avLst/>
+          </a:prstGeom>
+          <a:solidFill>
+            <a:srgbClr val="E6E3DA"/>
+          </a:solidFill>
+          <a:ln>
+            <a:noFill/>
+          </a:ln>
+          <a:effectLst/>
+        </p:spPr>
+        <p:style>
+          <a:lnRef idx="1">
+            <a:schemeClr val="accent1"/>
+          </a:lnRef>
+          <a:fillRef idx="3">
+            <a:schemeClr val="accent1"/>
+          </a:fillRef>
+          <a:effectRef idx="2">
+            <a:schemeClr val="accent1"/>
+          </a:effectRef>
+          <a:fontRef idx="minor">
+            <a:schemeClr val="lt1"/>
+          </a:fontRef>
+        </p:style>
+        <p:txBody>
+          <a:bodyPr rtlCol="0" anchor="ctr"/>
+          <a:lstStyle/>
+          <a:p>
+            <a:pPr algn="ctr"/>
+          </a:p>
+        </p:txBody>
+      </p:sp>
+      <p:sp>
+        <p:nvSpPr>
+          <p:cNvPr id="19" name="Rounded Rectangle 18"/>
+          <p:cNvSpPr/>
+          <p:nvPr/>
+        </p:nvSpPr>
+        <p:spPr>
+          <a:xfrm>
+            <a:off x="457200" y="2802636"/>
+            <a:ext cx="502920" cy="502920"/>
+          </a:xfrm>
+          <a:prstGeom prst="roundRect">
+            <a:avLst>
+              <a:gd name="adj" fmla="val 18000"/>
+            </a:avLst>
           </a:prstGeom>
           <a:solidFill>
             <a:srgbClr val="2C3A47"/>
@@ -17523,7 +17698,7 @@
       </p:sp>
       <p:pic>
         <p:nvPicPr>
-          <p:cNvPr id="16" name="Picture 15" descr="clock_ffffff_128.png"/>
+          <p:cNvPr id="20" name="Picture 19" descr="clock_ffffff_128.png"/>
           <p:cNvPicPr>
             <a:picLocks noChangeAspect="1"/>
           </p:cNvPicPr>
@@ -17537,8 +17712,8 @@
         </p:blipFill>
         <p:spPr>
           <a:xfrm>
-            <a:off x="503652" y="2734116"/>
-            <a:ext cx="199704" cy="199704"/>
+            <a:off x="577901" y="2923337"/>
+            <a:ext cx="261518" cy="261518"/>
           </a:xfrm>
           <a:prstGeom prst="rect">
             <a:avLst/>
@@ -17547,14 +17722,14 @@
       </p:pic>
       <p:sp>
         <p:nvSpPr>
-          <p:cNvPr id="17" name="TextBox 16"/>
+          <p:cNvPr id="21" name="TextBox 20"/>
           <p:cNvSpPr txBox="1"/>
           <p:nvPr/>
         </p:nvSpPr>
         <p:spPr>
           <a:xfrm>
-            <a:off x="850392" y="2641944"/>
-            <a:ext cx="2404628" cy="384048"/>
+            <a:off x="1014984" y="2779776"/>
+            <a:ext cx="608383" cy="548640"/>
           </a:xfrm>
           <a:prstGeom prst="rect">
             <a:avLst/>
@@ -17568,9 +17743,6 @@
           <a:lstStyle/>
           <a:p>
             <a:pPr algn="l">
-              <a:lnSpc>
-                <a:spcPts val="1995"/>
-              </a:lnSpc>
               <a:spcBef>
                 <a:spcPts val="0"/>
               </a:spcBef>
@@ -17585,30 +17757,21 @@
                 </a:solidFill>
                 <a:latin typeface="Segoe UI"/>
               </a:rPr>
-              <a:t>18 </a:t>
-            </a:r>
-            <a:r>
-              <a:rPr sz="1500" b="1" i="0">
-                <a:solidFill>
-                  <a:srgbClr val="2B2B2B"/>
-                </a:solidFill>
-                <a:latin typeface="Segoe UI"/>
-              </a:rPr>
-              <a:t>mo</a:t>
-            </a:r>
-          </a:p>
-        </p:txBody>
-      </p:sp>
-      <p:sp>
-        <p:nvSpPr>
-          <p:cNvPr id="18" name="TextBox 17"/>
+              <a:t>18 mo</a:t>
+            </a:r>
+          </a:p>
+        </p:txBody>
+      </p:sp>
+      <p:sp>
+        <p:nvSpPr>
+          <p:cNvPr id="22" name="TextBox 21"/>
           <p:cNvSpPr txBox="1"/>
           <p:nvPr/>
         </p:nvSpPr>
         <p:spPr>
           <a:xfrm>
-            <a:off x="3309884" y="2641944"/>
-            <a:ext cx="8470636" cy="384048"/>
+            <a:off x="1623367" y="2969636"/>
+            <a:ext cx="10111433" cy="168920"/>
           </a:xfrm>
           <a:prstGeom prst="rect">
             <a:avLst/>
@@ -17616,7 +17779,7 @@
           <a:noFill/>
         </p:spPr>
         <p:txBody>
-          <a:bodyPr wrap="square" lIns="0" rIns="0" tIns="0" bIns="0" anchor="ctr">
+          <a:bodyPr wrap="square" lIns="0" rIns="0" tIns="0" bIns="0" anchor="t">
             <a:noAutofit/>
           </a:bodyPr>
           <a:lstStyle/>
@@ -17772,14 +17935,14 @@
       </p:sp>
       <p:sp>
         <p:nvSpPr>
-          <p:cNvPr id="19" name="Rectangle 18"/>
+          <p:cNvPr id="23" name="Rectangle 22"/>
           <p:cNvSpPr/>
           <p:nvPr/>
         </p:nvSpPr>
         <p:spPr>
           <a:xfrm>
-            <a:off x="411480" y="3245448"/>
-            <a:ext cx="2807970" cy="1234440"/>
+            <a:off x="411480" y="3827695"/>
+            <a:ext cx="2807970" cy="1102783"/>
           </a:xfrm>
           <a:prstGeom prst="rect">
             <a:avLst/>
@@ -17790,7 +17953,13 @@
           <a:ln>
             <a:noFill/>
           </a:ln>
-          <a:effectLst/>
+          <a:effectLst>
+            <a:outerShdw blurRad="40000" dist="24000" dir="5400000" rotWithShape="0">
+              <a:srgbClr val="1A1A1A">
+                <a:alpha val="62000"/>
+              </a:srgbClr>
+            </a:outerShdw>
+          </a:effectLst>
         </p:spPr>
         <p:style>
           <a:lnRef idx="1">
@@ -17971,14 +18140,14 @@
       </p:sp>
       <p:sp>
         <p:nvSpPr>
-          <p:cNvPr id="20" name="Rectangle 19"/>
+          <p:cNvPr id="24" name="Rectangle 23"/>
           <p:cNvSpPr/>
           <p:nvPr/>
         </p:nvSpPr>
         <p:spPr>
           <a:xfrm>
-            <a:off x="3265170" y="3245448"/>
-            <a:ext cx="2807970" cy="1234440"/>
+            <a:off x="3265170" y="3827695"/>
+            <a:ext cx="2807970" cy="1102783"/>
           </a:xfrm>
           <a:prstGeom prst="rect">
             <a:avLst/>
@@ -17989,7 +18158,13 @@
           <a:ln>
             <a:noFill/>
           </a:ln>
-          <a:effectLst/>
+          <a:effectLst>
+            <a:outerShdw blurRad="40000" dist="24000" dir="5400000" rotWithShape="0">
+              <a:srgbClr val="1A1A1A">
+                <a:alpha val="62000"/>
+              </a:srgbClr>
+            </a:outerShdw>
+          </a:effectLst>
         </p:spPr>
         <p:style>
           <a:lnRef idx="1">
@@ -18143,14 +18318,14 @@
       </p:sp>
       <p:sp>
         <p:nvSpPr>
-          <p:cNvPr id="21" name="Rectangle 20"/>
+          <p:cNvPr id="25" name="Rectangle 24"/>
           <p:cNvSpPr/>
           <p:nvPr/>
         </p:nvSpPr>
         <p:spPr>
           <a:xfrm>
-            <a:off x="6118860" y="3245448"/>
-            <a:ext cx="2807970" cy="1234440"/>
+            <a:off x="6118860" y="3827695"/>
+            <a:ext cx="2807970" cy="1102783"/>
           </a:xfrm>
           <a:prstGeom prst="rect">
             <a:avLst/>
@@ -18161,7 +18336,13 @@
           <a:ln>
             <a:noFill/>
           </a:ln>
-          <a:effectLst/>
+          <a:effectLst>
+            <a:outerShdw blurRad="40000" dist="24000" dir="5400000" rotWithShape="0">
+              <a:srgbClr val="1A1A1A">
+                <a:alpha val="62000"/>
+              </a:srgbClr>
+            </a:outerShdw>
+          </a:effectLst>
         </p:spPr>
         <p:style>
           <a:lnRef idx="1">
@@ -18306,14 +18487,14 @@
       </p:sp>
       <p:sp>
         <p:nvSpPr>
-          <p:cNvPr id="22" name="Rectangle 21"/>
+          <p:cNvPr id="26" name="Rectangle 25"/>
           <p:cNvSpPr/>
           <p:nvPr/>
         </p:nvSpPr>
         <p:spPr>
           <a:xfrm>
-            <a:off x="8972550" y="3245448"/>
-            <a:ext cx="2807970" cy="1234440"/>
+            <a:off x="8972550" y="3827695"/>
+            <a:ext cx="2807970" cy="1102783"/>
           </a:xfrm>
           <a:prstGeom prst="rect">
             <a:avLst/>
@@ -18324,7 +18505,13 @@
           <a:ln>
             <a:noFill/>
           </a:ln>
-          <a:effectLst/>
+          <a:effectLst>
+            <a:outerShdw blurRad="40000" dist="24000" dir="5400000" rotWithShape="0">
+              <a:srgbClr val="1A1A1A">
+                <a:alpha val="62000"/>
+              </a:srgbClr>
+            </a:outerShdw>
+          </a:effectLst>
         </p:spPr>
         <p:style>
           <a:lnRef idx="1">
@@ -18478,14 +18665,14 @@
       </p:sp>
       <p:sp>
         <p:nvSpPr>
-          <p:cNvPr id="23" name="Rectangle 22"/>
+          <p:cNvPr id="27" name="Rectangle 26"/>
           <p:cNvSpPr/>
           <p:nvPr/>
         </p:nvSpPr>
         <p:spPr>
           <a:xfrm>
-            <a:off x="411480" y="4781640"/>
-            <a:ext cx="11369040" cy="1148481"/>
+            <a:off x="411480" y="5149934"/>
+            <a:ext cx="11369040" cy="933548"/>
           </a:xfrm>
           <a:prstGeom prst="rect">
             <a:avLst/>
@@ -18496,7 +18683,13 @@
           <a:ln>
             <a:noFill/>
           </a:ln>
-          <a:effectLst/>
+          <a:effectLst>
+            <a:outerShdw blurRad="40000" dist="24000" dir="5400000" rotWithShape="0">
+              <a:srgbClr val="1A1A1A">
+                <a:alpha val="62000"/>
+              </a:srgbClr>
+            </a:outerShdw>
+          </a:effectLst>
         </p:spPr>
         <p:style>
           <a:lnRef idx="1">
@@ -18522,14 +18715,14 @@
       </p:sp>
       <p:sp>
         <p:nvSpPr>
-          <p:cNvPr id="24" name="Rectangle 23"/>
+          <p:cNvPr id="28" name="Rectangle 27"/>
           <p:cNvSpPr/>
           <p:nvPr/>
         </p:nvSpPr>
         <p:spPr>
           <a:xfrm>
-            <a:off x="411480" y="4781640"/>
-            <a:ext cx="32004" cy="1148481"/>
+            <a:off x="411480" y="5149934"/>
+            <a:ext cx="32004" cy="933548"/>
           </a:xfrm>
           <a:prstGeom prst="rect">
             <a:avLst/>
@@ -18566,13 +18759,13 @@
       </p:sp>
       <p:sp>
         <p:nvSpPr>
-          <p:cNvPr id="25" name="TextBox 24"/>
+          <p:cNvPr id="29" name="TextBox 28"/>
           <p:cNvSpPr txBox="1"/>
           <p:nvPr/>
         </p:nvSpPr>
         <p:spPr>
           <a:xfrm>
-            <a:off x="484632" y="4854792"/>
+            <a:off x="484632" y="5223086"/>
             <a:ext cx="11222736" cy="244934"/>
           </a:xfrm>
           <a:prstGeom prst="rect">
@@ -18647,13 +18840,13 @@
       </p:sp>
       <p:sp>
         <p:nvSpPr>
-          <p:cNvPr id="26" name="TextBox 25"/>
+          <p:cNvPr id="30" name="TextBox 29"/>
           <p:cNvSpPr txBox="1"/>
           <p:nvPr/>
         </p:nvSpPr>
         <p:spPr>
           <a:xfrm>
-            <a:off x="484632" y="5136302"/>
+            <a:off x="484632" y="5504596"/>
             <a:ext cx="11222736" cy="337840"/>
           </a:xfrm>
           <a:prstGeom prst="rect">
@@ -19119,13 +19312,13 @@
       </p:sp>
       <p:sp>
         <p:nvSpPr>
-          <p:cNvPr id="27" name="TextBox 26"/>
+          <p:cNvPr id="31" name="TextBox 30"/>
           <p:cNvSpPr txBox="1"/>
           <p:nvPr/>
         </p:nvSpPr>
         <p:spPr>
           <a:xfrm>
-            <a:off x="411480" y="6084154"/>
+            <a:off x="411480" y="6193210"/>
             <a:ext cx="11369040" cy="143582"/>
           </a:xfrm>
           <a:prstGeom prst="rect">
@@ -19191,7 +19384,7 @@
       </p:sp>
       <p:cxnSp>
         <p:nvCxnSpPr>
-          <p:cNvPr id="28" name="Connector 27"/>
+          <p:cNvPr id="32" name="Connector 31"/>
           <p:cNvCxnSpPr/>
           <p:nvPr/>
         </p:nvCxnSpPr>
@@ -19226,7 +19419,7 @@
       </p:cxnSp>
       <p:sp>
         <p:nvSpPr>
-          <p:cNvPr id="29" name="TextBox 28"/>
+          <p:cNvPr id="33" name="TextBox 32"/>
           <p:cNvSpPr txBox="1"/>
           <p:nvPr/>
         </p:nvSpPr>
@@ -19268,7 +19461,7 @@
       </p:sp>
       <p:sp>
         <p:nvSpPr>
-          <p:cNvPr id="30" name="TextBox 29"/>
+          <p:cNvPr id="34" name="TextBox 33"/>
           <p:cNvSpPr txBox="1"/>
           <p:nvPr/>
         </p:nvSpPr>
@@ -19310,7 +19503,7 @@
       </p:sp>
       <p:sp>
         <p:nvSpPr>
-          <p:cNvPr id="31" name="TextBox 30"/>
+          <p:cNvPr id="35" name="TextBox 34"/>
           <p:cNvSpPr txBox="1"/>
           <p:nvPr/>
         </p:nvSpPr>

--- a/eval/out/showcase_qcommerce.pptx
+++ b/eval/out/showcase_qcommerce.pptx
@@ -639,7 +639,7 @@
           </c:val>
         </c:ser>
         <c:dLbls>
-          <c:numFmt formatCode="0&quot;&quot;" sourceLinked="0"/>
+          <c:numFmt formatCode="#,##0.#" sourceLinked="0"/>
           <c:txPr>
             <a:bodyPr/>
             <a:lstStyle/>
@@ -3796,7 +3796,7 @@
         </p:nvSpPr>
         <p:spPr>
           <a:xfrm>
-            <a:off x="9265920" y="320040"/>
+            <a:off x="1005840" y="320040"/>
             <a:ext cx="2560320" cy="274320"/>
           </a:xfrm>
           <a:prstGeom prst="rect">
@@ -3810,7 +3810,7 @@
           </a:bodyPr>
           <a:lstStyle/>
           <a:p>
-            <a:pPr algn="r">
+            <a:pPr algn="l">
               <a:spcBef>
                 <a:spcPts val="0"/>
               </a:spcBef>
@@ -14552,7 +14552,7 @@
         <p:spPr>
           <a:xfrm>
             <a:off x="411480" y="1691640"/>
-            <a:ext cx="1629562" cy="143582"/>
+            <a:ext cx="1682617" cy="143582"/>
           </a:xfrm>
           <a:prstGeom prst="rect">
             <a:avLst/>
@@ -14597,7 +14597,7 @@
         <p:spPr>
           <a:xfrm>
             <a:off x="411480" y="1999814"/>
-            <a:ext cx="1629562" cy="287164"/>
+            <a:ext cx="1682617" cy="287164"/>
           </a:xfrm>
           <a:prstGeom prst="rect">
             <a:avLst/>
@@ -14705,8 +14705,8 @@
         </p:nvSpPr>
         <p:spPr>
           <a:xfrm>
-            <a:off x="2147153" y="1691640"/>
-            <a:ext cx="1894840" cy="143582"/>
+            <a:off x="2094098" y="1691640"/>
+            <a:ext cx="2000950" cy="143582"/>
           </a:xfrm>
           <a:prstGeom prst="rect">
             <a:avLst/>
@@ -14750,8 +14750,8 @@
         </p:nvSpPr>
         <p:spPr>
           <a:xfrm>
-            <a:off x="2147153" y="1999814"/>
-            <a:ext cx="1894840" cy="287164"/>
+            <a:off x="2094098" y="1999814"/>
+            <a:ext cx="2000950" cy="287164"/>
           </a:xfrm>
           <a:prstGeom prst="rect">
             <a:avLst/>
@@ -14859,8 +14859,8 @@
         </p:nvSpPr>
         <p:spPr>
           <a:xfrm>
-            <a:off x="4148104" y="1691640"/>
-            <a:ext cx="1894840" cy="143582"/>
+            <a:off x="4095049" y="1691640"/>
+            <a:ext cx="2000950" cy="143582"/>
           </a:xfrm>
           <a:prstGeom prst="rect">
             <a:avLst/>
@@ -14904,8 +14904,8 @@
         </p:nvSpPr>
         <p:spPr>
           <a:xfrm>
-            <a:off x="4148104" y="1999814"/>
-            <a:ext cx="1894840" cy="287164"/>
+            <a:off x="4095049" y="1999814"/>
+            <a:ext cx="2000950" cy="287164"/>
           </a:xfrm>
           <a:prstGeom prst="rect">
             <a:avLst/>
@@ -15022,8 +15022,8 @@
         </p:nvSpPr>
         <p:spPr>
           <a:xfrm>
-            <a:off x="6149056" y="1691640"/>
-            <a:ext cx="1894840" cy="143582"/>
+            <a:off x="6096001" y="1691640"/>
+            <a:ext cx="2000950" cy="143582"/>
           </a:xfrm>
           <a:prstGeom prst="rect">
             <a:avLst/>
@@ -15067,8 +15067,8 @@
         </p:nvSpPr>
         <p:spPr>
           <a:xfrm>
-            <a:off x="6149056" y="1999814"/>
-            <a:ext cx="1894840" cy="287164"/>
+            <a:off x="6096001" y="1999814"/>
+            <a:ext cx="2000950" cy="287164"/>
           </a:xfrm>
           <a:prstGeom prst="rect">
             <a:avLst/>
@@ -15185,8 +15185,8 @@
         </p:nvSpPr>
         <p:spPr>
           <a:xfrm>
-            <a:off x="8150007" y="1691640"/>
-            <a:ext cx="1894840" cy="143582"/>
+            <a:off x="8096952" y="1691640"/>
+            <a:ext cx="2000950" cy="143582"/>
           </a:xfrm>
           <a:prstGeom prst="rect">
             <a:avLst/>
@@ -15230,8 +15230,8 @@
         </p:nvSpPr>
         <p:spPr>
           <a:xfrm>
-            <a:off x="8150007" y="1999814"/>
-            <a:ext cx="1894840" cy="287164"/>
+            <a:off x="8096952" y="1999814"/>
+            <a:ext cx="2000950" cy="287164"/>
           </a:xfrm>
           <a:prstGeom prst="rect">
             <a:avLst/>
@@ -15330,8 +15330,8 @@
         </p:nvSpPr>
         <p:spPr>
           <a:xfrm>
-            <a:off x="10150958" y="1691640"/>
-            <a:ext cx="1629562" cy="143582"/>
+            <a:off x="10097903" y="1691640"/>
+            <a:ext cx="1682617" cy="143582"/>
           </a:xfrm>
           <a:prstGeom prst="rect">
             <a:avLst/>
@@ -15375,8 +15375,8 @@
         </p:nvSpPr>
         <p:spPr>
           <a:xfrm>
-            <a:off x="10150958" y="1999814"/>
-            <a:ext cx="1629562" cy="287164"/>
+            <a:off x="10097903" y="1999814"/>
+            <a:ext cx="1682617" cy="287164"/>
           </a:xfrm>
           <a:prstGeom prst="rect">
             <a:avLst/>

--- a/eval/out/showcase_qcommerce.pptx
+++ b/eval/out/showcase_qcommerce.pptx
@@ -699,7 +699,9 @@
       </c:catAx>
       <c:valAx>
         <c:axId val="-2113994440"/>
-        <c:scaling/>
+        <c:scaling>
+          <c:min val="0.0"/>
+        </c:scaling>
         <c:delete val="0"/>
         <c:axPos val="l"/>
         <c:majorGridlines>

--- a/eval/out/showcase_qcommerce.pptx
+++ b/eval/out/showcase_qcommerce.pptx
@@ -30562,7 +30562,7 @@
       </p:sp>
       <p:sp>
         <p:nvSpPr>
-          <p:cNvPr id="86" name="Rounded Rectangle 85"/>
+          <p:cNvPr id="86" name="de:tab"/>
           <p:cNvSpPr/>
           <p:nvPr/>
         </p:nvSpPr>
